--- a/lecons/LSA/Climatology/LSA_CLIM_L09_Temperature_Inversion.pptx
+++ b/lecons/LSA/Climatology/LSA_CLIM_L09_Temperature_Inversion.pptx
@@ -2931,7 +2931,7 @@
           <a:p>
             <a:r>
               <a:rPr lang="en-US" dirty="0"/>
-              <a:t>Let us copy Meaning of Temperature Inversion. A temperature inversion can be understood as follows. Write each point on a new line, with the key term first.</a:t>
+              <a:t>Let us copy Meaning of Temperature Inversion. A temperature inversion can be understood as follows. On this slide we have Temperature inversion. Write each point on a new line, with the key term first, and explain it in your own words when we revise.</a:t>
             </a:r>
             <a:endParaRPr lang="en-US" dirty="0"/>
           </a:p>
@@ -3107,7 +3107,7 @@
           <a:p>
             <a:r>
               <a:rPr lang="en-US" dirty="0"/>
-              <a:t>Let us copy Types and Causes of Inversion. Inversions are of two main types. Write each point on a new line, with the key term first. When you finish, we go to the next slide.</a:t>
+              <a:t>Let us copy Types and Causes of Inversion. Inversions are of two main types. On this slide we have Surface (ground) inversion. Write each point on a new line, with the key term first, and explain it in your own words when we revise. When you finish, we go to the next slide.</a:t>
             </a:r>
             <a:endParaRPr lang="en-US" dirty="0"/>
           </a:p>
@@ -3195,7 +3195,7 @@
           <a:p>
             <a:r>
               <a:rPr lang="en-US" dirty="0"/>
-              <a:t>We continue with the same part. Write each point on a new line, with the key term first. When you finish, we go to the next slide.</a:t>
+              <a:t>We continue with Types and Causes of Inversion. On this slide we have Above-surface inversion. Write each point on a new line, with the key term first, and explain it in your own words when we revise. When you finish, we go to the next slide.</a:t>
             </a:r>
             <a:endParaRPr lang="en-US" dirty="0"/>
           </a:p>
@@ -3283,7 +3283,7 @@
           <a:p>
             <a:r>
               <a:rPr lang="en-US" dirty="0"/>
-              <a:t>We continue with the same part. Write each point on a new line, with the key term first.</a:t>
+              <a:t>We continue with Types and Causes of Inversion. On this slide we have Frontal and advection inversions. Write each point on a new line, with the key term first, and explain it in your own words when we revise.</a:t>
             </a:r>
             <a:endParaRPr lang="en-US" dirty="0"/>
           </a:p>
@@ -3371,7 +3371,7 @@
           <a:p>
             <a:r>
               <a:rPr lang="en-US" dirty="0"/>
-              <a:t>Let us copy Effects of Temperature Inversion. Inversions affect weather conditions and man in the following ways. Write each point on a new line, with the key term first. When you finish, we go to the next slide.</a:t>
+              <a:t>Let us copy Effects of Temperature Inversion. Inversions affect weather conditions and man in the following ways. On this slide we have Fog formation. Write each point on a new line, with the key term first, and explain it in your own words when we revise. When you finish, we go to the next slide.</a:t>
             </a:r>
             <a:endParaRPr lang="en-US" dirty="0"/>
           </a:p>
@@ -3547,7 +3547,7 @@
           <a:p>
             <a:r>
               <a:rPr lang="en-US" dirty="0"/>
-              <a:t>We continue with the same part. Write each point on a new line, with the key term first. When you finish, we go to the next slide.</a:t>
+              <a:t>We continue with Effects of Temperature Inversion. On this slide we have Frost. Write each point on a new line, with the key term first, and explain it in your own words when we revise. When you finish, we go to the next slide.</a:t>
             </a:r>
             <a:endParaRPr lang="en-US" dirty="0"/>
           </a:p>
@@ -3635,7 +3635,7 @@
           <a:p>
             <a:r>
               <a:rPr lang="en-US" dirty="0"/>
-              <a:t>We continue with the same part. Write each point on a new line, with the key term first.</a:t>
+              <a:t>We continue with Effects of Temperature Inversion. On this slide we have Air pollution and Stable weather. Write each point on a new line, with the key term first, and explain it in your own words when we revise.</a:t>
             </a:r>
             <a:endParaRPr lang="en-US" dirty="0"/>
           </a:p>
@@ -4955,7 +4955,7 @@
           <a:p>
             <a:r>
               <a:rPr lang="en-US" dirty="0"/>
-              <a:t>Here is the plan of our lesson today. We shall correction of the homework; then objectives and recall; then real-life situation and action to take; then learning activities; then board summary; then evaluation, remediation and homework.</a:t>
+              <a:t>Here is the plan of our lesson today. First, we shall correct the homework. Then we shall look at the objectives and recall what you already know. After that, we shall study a situation from real life and the action to take, and do the learning activities. Finally, we shall copy the board summary, do the evaluation and the remediation, and I will give you the homework.</a:t>
             </a:r>
             <a:endParaRPr lang="en-US" dirty="0"/>
           </a:p>
@@ -6495,7 +6495,7 @@
                 <a:ea typeface="Times New Roman" pitchFamily="34" charset="-122"/>
                 <a:cs typeface="Times New Roman" pitchFamily="34" charset="-120"/>
               </a:rPr>
-              <a:t>Lesson 9: Temperature Inversion</a:t>
+              <a:t>Lesson 9</a:t>
             </a:r>
             <a:endParaRPr lang="en-US" sz="2600" dirty="0"/>
           </a:p>
